--- a/docs/Диплом/Оригинал/Презинтация диплома.pptx
+++ b/docs/Диплом/Оригинал/Презинтация диплома.pptx
@@ -341,7 +341,7 @@
           <a:p>
             <a:fld id="{296FFB26-2CE6-4D97-B08E-7AA24BD03430}" type="datetimeFigureOut">
               <a:rPr lang="ru-RU" smtClean="0"/>
-              <a:t>14.01.2026</a:t>
+              <a:t>09.02.2026</a:t>
             </a:fld>
             <a:endParaRPr lang="ru-RU"/>
           </a:p>
@@ -616,7 +616,7 @@
           <a:p>
             <a:fld id="{296FFB26-2CE6-4D97-B08E-7AA24BD03430}" type="datetimeFigureOut">
               <a:rPr lang="ru-RU" smtClean="0"/>
-              <a:t>14.01.2026</a:t>
+              <a:t>09.02.2026</a:t>
             </a:fld>
             <a:endParaRPr lang="ru-RU"/>
           </a:p>
@@ -810,7 +810,7 @@
           <a:p>
             <a:fld id="{296FFB26-2CE6-4D97-B08E-7AA24BD03430}" type="datetimeFigureOut">
               <a:rPr lang="ru-RU" smtClean="0"/>
-              <a:t>14.01.2026</a:t>
+              <a:t>09.02.2026</a:t>
             </a:fld>
             <a:endParaRPr lang="ru-RU"/>
           </a:p>
@@ -1083,7 +1083,7 @@
           <a:p>
             <a:fld id="{296FFB26-2CE6-4D97-B08E-7AA24BD03430}" type="datetimeFigureOut">
               <a:rPr lang="ru-RU" smtClean="0"/>
-              <a:t>14.01.2026</a:t>
+              <a:t>09.02.2026</a:t>
             </a:fld>
             <a:endParaRPr lang="ru-RU"/>
           </a:p>
@@ -1424,7 +1424,7 @@
           <a:p>
             <a:fld id="{296FFB26-2CE6-4D97-B08E-7AA24BD03430}" type="datetimeFigureOut">
               <a:rPr lang="ru-RU" smtClean="0"/>
-              <a:t>14.01.2026</a:t>
+              <a:t>09.02.2026</a:t>
             </a:fld>
             <a:endParaRPr lang="ru-RU"/>
           </a:p>
@@ -2047,7 +2047,7 @@
           <a:p>
             <a:fld id="{296FFB26-2CE6-4D97-B08E-7AA24BD03430}" type="datetimeFigureOut">
               <a:rPr lang="ru-RU" smtClean="0"/>
-              <a:t>14.01.2026</a:t>
+              <a:t>09.02.2026</a:t>
             </a:fld>
             <a:endParaRPr lang="ru-RU"/>
           </a:p>
@@ -2907,7 +2907,7 @@
           <a:p>
             <a:fld id="{296FFB26-2CE6-4D97-B08E-7AA24BD03430}" type="datetimeFigureOut">
               <a:rPr lang="ru-RU" smtClean="0"/>
-              <a:t>14.01.2026</a:t>
+              <a:t>09.02.2026</a:t>
             </a:fld>
             <a:endParaRPr lang="ru-RU"/>
           </a:p>
@@ -3077,7 +3077,7 @@
           <a:p>
             <a:fld id="{296FFB26-2CE6-4D97-B08E-7AA24BD03430}" type="datetimeFigureOut">
               <a:rPr lang="ru-RU" smtClean="0"/>
-              <a:t>14.01.2026</a:t>
+              <a:t>09.02.2026</a:t>
             </a:fld>
             <a:endParaRPr lang="ru-RU"/>
           </a:p>
@@ -3257,7 +3257,7 @@
           <a:p>
             <a:fld id="{296FFB26-2CE6-4D97-B08E-7AA24BD03430}" type="datetimeFigureOut">
               <a:rPr lang="ru-RU" smtClean="0"/>
-              <a:t>14.01.2026</a:t>
+              <a:t>09.02.2026</a:t>
             </a:fld>
             <a:endParaRPr lang="ru-RU"/>
           </a:p>
@@ -3427,7 +3427,7 @@
           <a:p>
             <a:fld id="{296FFB26-2CE6-4D97-B08E-7AA24BD03430}" type="datetimeFigureOut">
               <a:rPr lang="ru-RU" smtClean="0"/>
-              <a:t>14.01.2026</a:t>
+              <a:t>09.02.2026</a:t>
             </a:fld>
             <a:endParaRPr lang="ru-RU"/>
           </a:p>
@@ -3674,7 +3674,7 @@
           <a:p>
             <a:fld id="{296FFB26-2CE6-4D97-B08E-7AA24BD03430}" type="datetimeFigureOut">
               <a:rPr lang="ru-RU" smtClean="0"/>
-              <a:t>14.01.2026</a:t>
+              <a:t>09.02.2026</a:t>
             </a:fld>
             <a:endParaRPr lang="ru-RU"/>
           </a:p>
@@ -3966,7 +3966,7 @@
           <a:p>
             <a:fld id="{296FFB26-2CE6-4D97-B08E-7AA24BD03430}" type="datetimeFigureOut">
               <a:rPr lang="ru-RU" smtClean="0"/>
-              <a:t>14.01.2026</a:t>
+              <a:t>09.02.2026</a:t>
             </a:fld>
             <a:endParaRPr lang="ru-RU"/>
           </a:p>
@@ -4410,7 +4410,7 @@
           <a:p>
             <a:fld id="{296FFB26-2CE6-4D97-B08E-7AA24BD03430}" type="datetimeFigureOut">
               <a:rPr lang="ru-RU" smtClean="0"/>
-              <a:t>14.01.2026</a:t>
+              <a:t>09.02.2026</a:t>
             </a:fld>
             <a:endParaRPr lang="ru-RU"/>
           </a:p>
@@ -4528,7 +4528,7 @@
           <a:p>
             <a:fld id="{296FFB26-2CE6-4D97-B08E-7AA24BD03430}" type="datetimeFigureOut">
               <a:rPr lang="ru-RU" smtClean="0"/>
-              <a:t>14.01.2026</a:t>
+              <a:t>09.02.2026</a:t>
             </a:fld>
             <a:endParaRPr lang="ru-RU"/>
           </a:p>
@@ -4623,7 +4623,7 @@
           <a:p>
             <a:fld id="{296FFB26-2CE6-4D97-B08E-7AA24BD03430}" type="datetimeFigureOut">
               <a:rPr lang="ru-RU" smtClean="0"/>
-              <a:t>14.01.2026</a:t>
+              <a:t>09.02.2026</a:t>
             </a:fld>
             <a:endParaRPr lang="ru-RU"/>
           </a:p>
@@ -4902,7 +4902,7 @@
           <a:p>
             <a:fld id="{296FFB26-2CE6-4D97-B08E-7AA24BD03430}" type="datetimeFigureOut">
               <a:rPr lang="ru-RU" smtClean="0"/>
-              <a:t>14.01.2026</a:t>
+              <a:t>09.02.2026</a:t>
             </a:fld>
             <a:endParaRPr lang="ru-RU"/>
           </a:p>
@@ -5177,7 +5177,7 @@
           <a:p>
             <a:fld id="{296FFB26-2CE6-4D97-B08E-7AA24BD03430}" type="datetimeFigureOut">
               <a:rPr lang="ru-RU" smtClean="0"/>
-              <a:t>14.01.2026</a:t>
+              <a:t>09.02.2026</a:t>
             </a:fld>
             <a:endParaRPr lang="ru-RU"/>
           </a:p>
@@ -5606,7 +5606,7 @@
           <a:p>
             <a:fld id="{296FFB26-2CE6-4D97-B08E-7AA24BD03430}" type="datetimeFigureOut">
               <a:rPr lang="ru-RU" smtClean="0"/>
-              <a:t>14.01.2026</a:t>
+              <a:t>09.02.2026</a:t>
             </a:fld>
             <a:endParaRPr lang="ru-RU"/>
           </a:p>
@@ -7426,7 +7426,7 @@
               <a:t>дерево </a:t>
             </a:r>
             <a:r>
-              <a:rPr lang="en-US" sz="1600" b="1" i="1" dirty="0" err="1">
+              <a:rPr lang="en-US" sz="1600" b="1" i="1" dirty="0">
                 <a:solidFill>
                   <a:schemeClr val="bg1">
                     <a:lumMod val="75000"/>
@@ -7641,7 +7641,7 @@
           <a:lstStyle/>
           <a:p>
             <a:r>
-              <a:rPr lang="en-US" b="1" dirty="0" err="1">
+              <a:rPr lang="en-US" b="1" dirty="0">
                 <a:latin typeface="Georgia" panose="02040502050405020303" pitchFamily="18" charset="0"/>
               </a:rPr>
               <a:t>QTreeView</a:t>
@@ -7661,7 +7661,7 @@
           </a:p>
           <a:p>
             <a:r>
-              <a:rPr lang="en-US" b="1" dirty="0" err="1">
+              <a:rPr lang="en-US" b="1" dirty="0">
                 <a:latin typeface="Georgia" panose="02040502050405020303" pitchFamily="18" charset="0"/>
               </a:rPr>
               <a:t>STMDFileTreeModel</a:t>
@@ -7708,16 +7708,10 @@
           </a:p>
           <a:p>
             <a:r>
-              <a:rPr lang="en-US" b="1" dirty="0" err="1">
-                <a:latin typeface="Georgia" panose="02040502050405020303" pitchFamily="18" charset="0"/>
-              </a:rPr>
-              <a:t>STMDFileTreeItem</a:t>
-            </a:r>
-            <a:r>
               <a:rPr lang="en-US" b="1" dirty="0">
                 <a:latin typeface="Georgia" panose="02040502050405020303" pitchFamily="18" charset="0"/>
               </a:rPr>
-              <a:t> </a:t>
+              <a:t>STMDFileTreeItem </a:t>
             </a:r>
             <a:r>
               <a:rPr lang="en-US" dirty="0">
@@ -7734,7 +7728,7 @@
           </a:p>
           <a:p>
             <a:r>
-              <a:rPr lang="en-US" b="1" dirty="0" err="1">
+              <a:rPr lang="en-US" b="1" dirty="0">
                 <a:latin typeface="Georgia" panose="02040502050405020303" pitchFamily="18" charset="0"/>
               </a:rPr>
               <a:t>ContentCache</a:t>
@@ -7749,24 +7743,12 @@
               <a:rPr lang="ru-RU" dirty="0">
                 <a:latin typeface="Georgia" panose="02040502050405020303" pitchFamily="18" charset="0"/>
               </a:rPr>
-              <a:t>кэш результатов </a:t>
-            </a:r>
-            <a:r>
-              <a:rPr lang="ru-RU" dirty="0" err="1">
-                <a:latin typeface="Georgia" panose="02040502050405020303" pitchFamily="18" charset="0"/>
-              </a:rPr>
-              <a:t>парсинга</a:t>
-            </a:r>
-            <a:r>
-              <a:rPr lang="ru-RU" dirty="0">
-                <a:latin typeface="Georgia" panose="02040502050405020303" pitchFamily="18" charset="0"/>
-              </a:rPr>
-              <a:t> (ускоряет загрузку при повторном обращении).</a:t>
-            </a:r>
-          </a:p>
-          <a:p>
-            <a:r>
-              <a:rPr lang="en-US" b="1" dirty="0" err="1">
+              <a:t>кэш результатов парсинга (ускоряет загрузку при повторном обращении).</a:t>
+            </a:r>
+          </a:p>
+          <a:p>
+            <a:r>
+              <a:rPr lang="en-US" b="1" dirty="0">
                 <a:latin typeface="Georgia" panose="02040502050405020303" pitchFamily="18" charset="0"/>
               </a:rPr>
               <a:t>FileParserService</a:t>
@@ -7970,8 +7952,8 @@
         </p:blipFill>
         <p:spPr>
           <a:xfrm>
-            <a:off x="667360" y="2429887"/>
-            <a:ext cx="6006179" cy="3215698"/>
+            <a:off x="667360" y="2221086"/>
+            <a:ext cx="6396170" cy="3424499"/>
           </a:xfrm>
           <a:prstGeom prst="rect">
             <a:avLst/>
@@ -7992,7 +7974,7 @@
         </p:nvSpPr>
         <p:spPr>
           <a:xfrm>
-            <a:off x="6982616" y="2837407"/>
+            <a:off x="7110500" y="2828835"/>
             <a:ext cx="2405979" cy="1200329"/>
           </a:xfrm>
           <a:prstGeom prst="rect">
@@ -8439,12 +8421,9 @@
             </a:pPr>
             <a:r>
               <a:rPr lang="ru-RU" dirty="0">
-                <a:solidFill>
-                  <a:schemeClr val="accent1"/>
-                </a:solidFill>
                 <a:latin typeface="Georgia" panose="02040502050405020303" pitchFamily="18" charset="0"/>
               </a:rPr>
-              <a:t>Создано специализированное, лёгкое и быстрое средство для систематизации знаний и повторного использования решений.</a:t>
+              <a:t>Разработан специализированный инструмент для упорядочивания учебных материалов и быстрого доступа к готовым решениям.</a:t>
             </a:r>
           </a:p>
           <a:p>
@@ -8599,7 +8578,7 @@
         </p:nvSpPr>
         <p:spPr>
           <a:xfrm>
-            <a:off x="1086814" y="2050516"/>
+            <a:off x="1086814" y="2281356"/>
             <a:ext cx="9603275" cy="2541431"/>
           </a:xfrm>
         </p:spPr>
@@ -10820,31 +10799,19 @@
               <a:rPr lang="ru-RU" dirty="0">
                 <a:latin typeface="Georgia" panose="02040502050405020303" pitchFamily="18" charset="0"/>
               </a:rPr>
-              <a:t>Инфраструктурный слой: конфигурация, </a:t>
-            </a:r>
-            <a:r>
-              <a:rPr lang="ru-RU" dirty="0" err="1">
+              <a:t>Инфраструктурный слой: конфигурация </a:t>
+            </a:r>
+            <a:r>
+              <a:rPr lang="en-US" dirty="0">
                 <a:latin typeface="Georgia" panose="02040502050405020303" pitchFamily="18" charset="0"/>
               </a:rPr>
-              <a:t>file</a:t>
+              <a:t>ANTLR4</a:t>
             </a:r>
             <a:r>
               <a:rPr lang="ru-RU" dirty="0">
                 <a:latin typeface="Georgia" panose="02040502050405020303" pitchFamily="18" charset="0"/>
               </a:rPr>
-              <a:t> </a:t>
-            </a:r>
-            <a:r>
-              <a:rPr lang="ru-RU" dirty="0" err="1">
-                <a:latin typeface="Georgia" panose="02040502050405020303" pitchFamily="18" charset="0"/>
-              </a:rPr>
-              <a:t>watcher</a:t>
-            </a:r>
-            <a:r>
-              <a:rPr lang="ru-RU" dirty="0">
-                <a:latin typeface="Georgia" panose="02040502050405020303" pitchFamily="18" charset="0"/>
-              </a:rPr>
-              <a:t>, кэширование.</a:t>
+              <a:t>, file watcher, кэширование.</a:t>
             </a:r>
           </a:p>
           <a:p>
@@ -10888,7 +10855,19 @@
               <a:rPr lang="ru-RU" dirty="0">
                 <a:latin typeface="Georgia" panose="02040502050405020303" pitchFamily="18" charset="0"/>
               </a:rPr>
-              <a:t>Используемые паттерны: MVVM, Observer, Factory.</a:t>
+              <a:t>Используемые паттерны: Observer, Factory, </a:t>
+            </a:r>
+            <a:r>
+              <a:rPr lang="en-US" dirty="0">
+                <a:latin typeface="Georgia" panose="02040502050405020303" pitchFamily="18" charset="0"/>
+              </a:rPr>
+              <a:t>Singleton</a:t>
+            </a:r>
+            <a:r>
+              <a:rPr lang="ru-RU" dirty="0">
+                <a:latin typeface="Georgia" panose="02040502050405020303" pitchFamily="18" charset="0"/>
+              </a:rPr>
+              <a:t>.</a:t>
             </a:r>
           </a:p>
           <a:p>
@@ -10980,8 +10959,8 @@
         </p:blipFill>
         <p:spPr>
           <a:xfrm>
-            <a:off x="646111" y="1091601"/>
-            <a:ext cx="5622609" cy="5659440"/>
+            <a:off x="646111" y="983988"/>
+            <a:ext cx="5729522" cy="5767053"/>
           </a:xfrm>
         </p:spPr>
       </p:pic>
@@ -11000,7 +10979,7 @@
         <p:spPr>
           <a:xfrm>
             <a:off x="6778129" y="5758951"/>
-            <a:ext cx="4092121" cy="523220"/>
+            <a:ext cx="4092121" cy="738664"/>
           </a:xfrm>
           <a:prstGeom prst="rect">
             <a:avLst/>
@@ -11022,7 +11001,7 @@
                   </a:schemeClr>
                 </a:solidFill>
               </a:rPr>
-              <a:t>Архитектура приложения реализует паттерны MVVM</a:t>
+              <a:t>Архитектура приложения реализует многослойный подход с элементами MVVM</a:t>
             </a:r>
           </a:p>
         </p:txBody>
